--- a/curso_es/pptx/S86.pptx
+++ b/curso_es/pptx/S86.pptx
@@ -4214,7 +4214,7 @@
                 </a:solidFill>
                 <a:latin typeface="Nunito Sans"/>
               </a:rPr>
-              <a:t>Omar cree que los de un barrio inventado son conflictivos. Si uno hace algo mal, lo recuerda durante meses. Los cien que no hacen nada malo, ni los ve.</a:t>
+              <a:t>Un chico cree que los de un barrio inventado son conflictivos. Si uno hace algo mal, lo recuerda durante meses. Los cien que no hacen nada malo, ni los ve.</a:t>
             </a:r>
           </a:p>
         </p:txBody>
@@ -4262,7 +4262,7 @@
                 </a:solidFill>
                 <a:latin typeface="Nunito Sans"/>
               </a:rPr>
-              <a:t>Omar se fija solo en lo que confirma su idea: sesgo de confirmación (sesión 44).</a:t>
+              <a:t>Ese chico se fija solo en lo que confirma su idea: sesgo de confirmación (sesión 44).</a:t>
             </a:r>
           </a:p>
           <a:p>
@@ -4523,7 +4523,7 @@
                 </a:solidFill>
                 <a:latin typeface="Nunito Sans"/>
               </a:rPr>
-              <a:t>En el vestuario, Kevin suelta «Eso es de gais» cada vez que algo no le gusta. Cuando se lo dicen, contesta: «Solo es una broma. No tengo nada contra nadie».</a:t>
+              <a:t>En el vestuario, un chico suelta «Eso es de gais» cada vez que algo no le gusta. Cuando se lo dicen, contesta: «Solo es una broma. No tengo nada contra nadie».</a:t>
             </a:r>
           </a:p>
         </p:txBody>
@@ -4571,7 +4571,7 @@
                 </a:solidFill>
                 <a:latin typeface="Nunito Sans"/>
               </a:rPr>
-              <a:t>Kevin no quiere hacer daño. ¿Entonces no pasa nada?</a:t>
+              <a:t>Ese chico no quiere hacer daño. ¿Entonces no pasa nada?</a:t>
             </a:r>
           </a:p>
           <a:p>
@@ -4596,7 +4596,7 @@
                 </a:solidFill>
                 <a:latin typeface="Nunito Sans"/>
               </a:rPr>
-              <a:t>Parece que no: Kevin no odia a nadie y lo dice riéndose.</a:t>
+              <a:t>Parece que no: no odia a nadie y lo dice riéndose.</a:t>
             </a:r>
           </a:p>
           <a:p>
